--- a/ppt/truthprint-poster-en-1page.pptx
+++ b/ppt/truthprint-poster-en-1page.pptx
@@ -166,30 +166,33 @@
           </c:dLbls>
           <c:cat>
             <c:multiLvlStrRef>
-              <c:f>Sheet1!$A$2:$A$8</c:f>
+              <c:f>Sheet1!$A$2:$A$9</c:f>
               <c:multiLvlStrCache>
-                <c:ptCount val="7"/>
+                <c:ptCount val="8"/>
                 <c:lvl>
                   <c:pt idx="0">
-                    <c:v>10%</c:v>
+                    <c:v>30%</c:v>
                   </c:pt>
                   <c:pt idx="1">
-                    <c:v>20%</c:v>
+                    <c:v>40%</c:v>
                   </c:pt>
                   <c:pt idx="2">
-                    <c:v>30%</c:v>
+                    <c:v>42%</c:v>
                   </c:pt>
                   <c:pt idx="3">
-                    <c:v>40%</c:v>
+                    <c:v>44%</c:v>
                   </c:pt>
                   <c:pt idx="4">
+                    <c:v>46%</c:v>
+                  </c:pt>
+                  <c:pt idx="5">
+                    <c:v>48%</c:v>
+                  </c:pt>
+                  <c:pt idx="6">
                     <c:v>50%</c:v>
                   </c:pt>
-                  <c:pt idx="5">
-                    <c:v>55%</c:v>
-                  </c:pt>
-                  <c:pt idx="6">
-                    <c:v>60%</c:v>
+                  <c:pt idx="7">
+                    <c:v>52%</c:v>
                   </c:pt>
                 </c:lvl>
               </c:multiLvlStrCache>
@@ -197,10 +200,10 @@
           </c:cat>
           <c:val>
             <c:numRef>
-              <c:f>Sheet1!$B$2:$B$8</c:f>
+              <c:f>Sheet1!$B$2:$B$9</c:f>
               <c:numCache>
                 <c:formatCode>General</c:formatCode>
-                <c:ptCount val="7"/>
+                <c:ptCount val="8"/>
                 <c:pt idx="0">
                   <c:v>100</c:v>
                 </c:pt>
@@ -208,18 +211,21 @@
                   <c:v>100</c:v>
                 </c:pt>
                 <c:pt idx="2">
-                  <c:v>100</c:v>
+                  <c:v>99.8</c:v>
                 </c:pt>
                 <c:pt idx="3">
-                  <c:v>100</c:v>
+                  <c:v>98.2</c:v>
                 </c:pt>
                 <c:pt idx="4">
-                  <c:v>25.8</c:v>
+                  <c:v>95</c:v>
                 </c:pt>
                 <c:pt idx="5">
-                  <c:v>0</c:v>
+                  <c:v>77.4</c:v>
                 </c:pt>
                 <c:pt idx="6">
+                  <c:v>29</c:v>
+                </c:pt>
+                <c:pt idx="7">
                   <c:v>0</c:v>
                 </c:pt>
               </c:numCache>
@@ -3921,8 +3927,8 @@
         </p:nvSpPr>
         <p:spPr>
           <a:xfrm>
-            <a:off x="13030200" y="24643080"/>
-            <a:ext cx="10515600" cy="777240"/>
+            <a:off x="13030200" y="24505920"/>
+            <a:ext cx="10515600" cy="914400"/>
           </a:xfrm>
           <a:prstGeom prst="rect">
             <a:avLst/>
@@ -3938,7 +3944,7 @@
               <a:buNone/>
             </a:pPr>
             <a:r>
-              <a:rPr lang="en-US" sz="1700" i="1" dirty="0">
+              <a:rPr lang="en-US" sz="1600" i="1" dirty="0">
                 <a:solidFill>
                   <a:srgbClr val="5B6B78"/>
                 </a:solidFill>
@@ -3946,9 +3952,9 @@
                 <a:ea typeface="Calibri" pitchFamily="34" charset="-122"/>
                 <a:cs typeface="Calibri" pitchFamily="34" charset="-120"/>
               </a:rPr>
-              <a:t>Recovery holds to 40% carrier erasure, collapsing at ε ≈ 1 − R = 0.5 — exactly the predicted capacity cliff.</a:t>
-            </a:r>
-            <a:endParaRPr lang="en-US" sz="1700" dirty="0"/>
+              <a:t>Full recovery to 42% erasure; graceful transition (98% at 44%, 77% at 48%, 29% at 50%) then collapse at ε ≈ 1 − R = 0.5 — the predicted capacity cliff.</a:t>
+            </a:r>
+            <a:endParaRPr lang="en-US" sz="1600" dirty="0"/>
           </a:p>
         </p:txBody>
       </p:sp>
@@ -4965,7 +4971,7 @@
                           <a:ea typeface="Calibri" pitchFamily="34" charset="-122"/>
                           <a:cs typeface="Calibri" pitchFamily="34" charset="-120"/>
                         </a:rPr>
-                        <a:t>15/15 unit tests pass; selftest doubles as regression harness</a:t>
+                        <a:t>18/18 unit tests pass; selftest doubles as regression harness</a:t>
                       </a:r>
                       <a:endParaRPr lang="en-US" sz="1750" dirty="0">
                         <a:latin typeface="Calibri" charset="0"/>
@@ -5030,11 +5036,11 @@
         <p:spPr>
           <a:xfrm>
             <a:off x="24505920" y="13121640"/>
-            <a:ext cx="11338560" cy="6675120"/>
+            <a:ext cx="11338560" cy="6858000"/>
           </a:xfrm>
           <a:prstGeom prst="roundRect">
             <a:avLst>
-              <a:gd name="adj" fmla="val 1918"/>
+              <a:gd name="adj" fmla="val 1867"/>
             </a:avLst>
           </a:prstGeom>
           <a:solidFill>
@@ -5088,7 +5094,7 @@
                 <a:ea typeface="Cambria" pitchFamily="34" charset="-122"/>
                 <a:cs typeface="Cambria" pitchFamily="34" charset="-120"/>
               </a:rPr>
-              <a:t>8 · Difference from prior watermarks</a:t>
+              <a:t>8 · Measured translation robustness vs. baselines</a:t>
             </a:r>
             <a:endParaRPr lang="en-US" sz="3000" dirty="0"/>
           </a:p>
@@ -5117,11 +5123,11 @@
             <a:tbl>
               <a:tblPr/>
               <a:tblGrid>
-                <a:gridCol w="2651760"/>
-                <a:gridCol w="2651760"/>
-                <a:gridCol w="5212080"/>
+                <a:gridCol w="3840480"/>
+                <a:gridCol w="4114800"/>
+                <a:gridCol w="2560320"/>
               </a:tblGrid>
-              <a:tr h="960120">
+              <a:tr h="713232">
                 <a:tc>
                   <a:txBody>
                     <a:bodyPr/>
@@ -5139,7 +5145,7 @@
                           <a:ea typeface="Calibri" pitchFamily="34" charset="-122"/>
                           <a:cs typeface="Calibri" pitchFamily="34" charset="-120"/>
                         </a:rPr>
-                        <a:t>Family</a:t>
+                        <a:t>Method</a:t>
                       </a:r>
                       <a:endParaRPr lang="en-US" sz="1650" dirty="0">
                         <a:latin typeface="Calibri" charset="0"/>
@@ -5207,7 +5213,7 @@
                           <a:ea typeface="Calibri" pitchFamily="34" charset="-122"/>
                           <a:cs typeface="Calibri" pitchFamily="34" charset="-120"/>
                         </a:rPr>
-                        <a:t>Carrier</a:t>
+                        <a:t>Signal layer</a:t>
                       </a:r>
                       <a:endParaRPr lang="en-US" sz="1650" dirty="0">
                         <a:latin typeface="Calibri" charset="0"/>
@@ -5275,7 +5281,7 @@
                           <a:ea typeface="Calibri" pitchFamily="34" charset="-122"/>
                           <a:cs typeface="Calibri" pitchFamily="34" charset="-120"/>
                         </a:rPr>
-                        <a:t>Gap addressed</a:t>
+                        <a:t>TPR↓</a:t>
                       </a:r>
                       <a:endParaRPr lang="en-US" sz="1650" dirty="0">
                         <a:latin typeface="Calibri" charset="0"/>
@@ -5327,7 +5333,7 @@
                   </a:tcPr>
                 </a:tc>
               </a:tr>
-              <a:tr h="960120">
+              <a:tr h="713232">
                 <a:tc>
                   <a:txBody>
                     <a:bodyPr/>
@@ -5345,7 +5351,7 @@
                           <a:ea typeface="Calibri" pitchFamily="34" charset="-122"/>
                           <a:cs typeface="Calibri" pitchFamily="34" charset="-120"/>
                         </a:rPr>
-                        <a:t>SynthID-Text, KGW</a:t>
+                        <a:t>SynthID-Text/KGW</a:t>
                       </a:r>
                       <a:endParaRPr lang="en-US" sz="1650" dirty="0">
                         <a:latin typeface="Calibri" charset="0"/>
@@ -5413,7 +5419,145 @@
                           <a:ea typeface="Calibri" pitchFamily="34" charset="-122"/>
                           <a:cs typeface="Calibri" pitchFamily="34" charset="-120"/>
                         </a:rPr>
-                        <a:t>token statistics</a:t>
+                        <a:t>token identity</a:t>
+                      </a:r>
+                      <a:endParaRPr lang="en-US" sz="1650" dirty="0">
+                        <a:latin typeface="Calibri" charset="0"/>
+                        <a:ea typeface="Calibri" charset="0"/>
+                        <a:cs typeface="Calibri" charset="0"/>
+                      </a:endParaRPr>
+                    </a:p>
+                  </a:txBody>
+                  <a:tcPr marL="73152" marR="73152" marT="73152" marB="73152" anchor="ctr">
+                    <a:lnL w="12700" cap="flat" cmpd="sng" algn="ctr">
+                      <a:solidFill>
+                        <a:srgbClr val="E3EBF0"/>
+                      </a:solidFill>
+                      <a:prstDash val="solid"/>
+                      <a:round/>
+                      <a:headEnd type="none" w="med" len="med"/>
+                      <a:tailEnd type="none" w="med" len="med"/>
+                    </a:lnL>
+                    <a:lnR w="12700" cap="flat" cmpd="sng" algn="ctr">
+                      <a:solidFill>
+                        <a:srgbClr val="E3EBF0"/>
+                      </a:solidFill>
+                      <a:prstDash val="solid"/>
+                      <a:round/>
+                      <a:headEnd type="none" w="med" len="med"/>
+                      <a:tailEnd type="none" w="med" len="med"/>
+                    </a:lnR>
+                    <a:lnT w="12700" cap="flat" cmpd="sng" algn="ctr">
+                      <a:solidFill>
+                        <a:srgbClr val="E3EBF0"/>
+                      </a:solidFill>
+                      <a:prstDash val="solid"/>
+                      <a:round/>
+                      <a:headEnd type="none" w="med" len="med"/>
+                      <a:tailEnd type="none" w="med" len="med"/>
+                    </a:lnT>
+                    <a:lnB w="12700" cap="flat" cmpd="sng" algn="ctr">
+                      <a:solidFill>
+                        <a:srgbClr val="E3EBF0"/>
+                      </a:solidFill>
+                      <a:prstDash val="solid"/>
+                      <a:round/>
+                      <a:headEnd type="none" w="med" len="med"/>
+                      <a:tailEnd type="none" w="med" len="med"/>
+                    </a:lnB>
+                    <a:solidFill>
+                      <a:srgbClr val="FFFFFF"/>
+                    </a:solidFill>
+                  </a:tcPr>
+                </a:tc>
+                <a:tc>
+                  <a:txBody>
+                    <a:bodyPr/>
+                    <a:lstStyle/>
+                    <a:p>
+                      <a:pPr indent="0" marL="0">
+                        <a:buNone/>
+                      </a:pPr>
+                      <a:r>
+                        <a:rPr lang="en-US" sz="1650" b="1" dirty="0">
+                          <a:solidFill>
+                            <a:srgbClr val="C0564A"/>
+                          </a:solidFill>
+                          <a:latin typeface="Calibri" pitchFamily="34" charset="0"/>
+                          <a:ea typeface="Calibri" pitchFamily="34" charset="-122"/>
+                          <a:cs typeface="Calibri" pitchFamily="34" charset="-120"/>
+                        </a:rPr>
+                        <a:t>0.02</a:t>
+                      </a:r>
+                      <a:endParaRPr lang="en-US" sz="1650" dirty="0">
+                        <a:latin typeface="Calibri" charset="0"/>
+                        <a:ea typeface="Calibri" charset="0"/>
+                        <a:cs typeface="Calibri" charset="0"/>
+                      </a:endParaRPr>
+                    </a:p>
+                  </a:txBody>
+                  <a:tcPr marL="73152" marR="73152" marT="73152" marB="73152" anchor="ctr">
+                    <a:lnL w="12700" cap="flat" cmpd="sng" algn="ctr">
+                      <a:solidFill>
+                        <a:srgbClr val="E3EBF0"/>
+                      </a:solidFill>
+                      <a:prstDash val="solid"/>
+                      <a:round/>
+                      <a:headEnd type="none" w="med" len="med"/>
+                      <a:tailEnd type="none" w="med" len="med"/>
+                    </a:lnL>
+                    <a:lnR w="12700" cap="flat" cmpd="sng" algn="ctr">
+                      <a:solidFill>
+                        <a:srgbClr val="E3EBF0"/>
+                      </a:solidFill>
+                      <a:prstDash val="solid"/>
+                      <a:round/>
+                      <a:headEnd type="none" w="med" len="med"/>
+                      <a:tailEnd type="none" w="med" len="med"/>
+                    </a:lnR>
+                    <a:lnT w="12700" cap="flat" cmpd="sng" algn="ctr">
+                      <a:solidFill>
+                        <a:srgbClr val="E3EBF0"/>
+                      </a:solidFill>
+                      <a:prstDash val="solid"/>
+                      <a:round/>
+                      <a:headEnd type="none" w="med" len="med"/>
+                      <a:tailEnd type="none" w="med" len="med"/>
+                    </a:lnT>
+                    <a:lnB w="12700" cap="flat" cmpd="sng" algn="ctr">
+                      <a:solidFill>
+                        <a:srgbClr val="E3EBF0"/>
+                      </a:solidFill>
+                      <a:prstDash val="solid"/>
+                      <a:round/>
+                      <a:headEnd type="none" w="med" len="med"/>
+                      <a:tailEnd type="none" w="med" len="med"/>
+                    </a:lnB>
+                    <a:solidFill>
+                      <a:srgbClr val="FFFFFF"/>
+                    </a:solidFill>
+                  </a:tcPr>
+                </a:tc>
+              </a:tr>
+              <a:tr h="713232">
+                <a:tc>
+                  <a:txBody>
+                    <a:bodyPr/>
+                    <a:lstStyle/>
+                    <a:p>
+                      <a:pPr indent="0" marL="0">
+                        <a:buNone/>
+                      </a:pPr>
+                      <a:r>
+                        <a:rPr lang="en-US" sz="1650" dirty="0">
+                          <a:solidFill>
+                            <a:srgbClr val="243342"/>
+                          </a:solidFill>
+                          <a:latin typeface="Calibri" pitchFamily="34" charset="0"/>
+                          <a:ea typeface="Calibri" pitchFamily="34" charset="-122"/>
+                          <a:cs typeface="Calibri" pitchFamily="34" charset="-120"/>
+                        </a:rPr>
+                        <a:t>DEW</a:t>
                       </a:r>
                       <a:endParaRPr lang="en-US" sz="1650" dirty="0">
                         <a:latin typeface="Calibri" charset="0"/>
@@ -5481,7 +5625,7 @@
                           <a:ea typeface="Calibri" pitchFamily="34" charset="-122"/>
                           <a:cs typeface="Calibri" pitchFamily="34" charset="-120"/>
                         </a:rPr>
-                        <a:t>translation/paraphrase replace tokens → signal lost</a:t>
+                        <a:t>edit-aligned token</a:t>
                       </a:r>
                       <a:endParaRPr lang="en-US" sz="1650" dirty="0">
                         <a:latin typeface="Calibri" charset="0"/>
@@ -5532,8 +5676,76 @@
                     </a:solidFill>
                   </a:tcPr>
                 </a:tc>
+                <a:tc>
+                  <a:txBody>
+                    <a:bodyPr/>
+                    <a:lstStyle/>
+                    <a:p>
+                      <a:pPr indent="0" marL="0">
+                        <a:buNone/>
+                      </a:pPr>
+                      <a:r>
+                        <a:rPr lang="en-US" sz="1650" b="1" dirty="0">
+                          <a:solidFill>
+                            <a:srgbClr val="C0564A"/>
+                          </a:solidFill>
+                          <a:latin typeface="Calibri" pitchFamily="34" charset="0"/>
+                          <a:ea typeface="Calibri" pitchFamily="34" charset="-122"/>
+                          <a:cs typeface="Calibri" pitchFamily="34" charset="-120"/>
+                        </a:rPr>
+                        <a:t>0.00</a:t>
+                      </a:r>
+                      <a:endParaRPr lang="en-US" sz="1650" dirty="0">
+                        <a:latin typeface="Calibri" charset="0"/>
+                        <a:ea typeface="Calibri" charset="0"/>
+                        <a:cs typeface="Calibri" charset="0"/>
+                      </a:endParaRPr>
+                    </a:p>
+                  </a:txBody>
+                  <a:tcPr marL="73152" marR="73152" marT="73152" marB="73152" anchor="ctr">
+                    <a:lnL w="12700" cap="flat" cmpd="sng" algn="ctr">
+                      <a:solidFill>
+                        <a:srgbClr val="E3EBF0"/>
+                      </a:solidFill>
+                      <a:prstDash val="solid"/>
+                      <a:round/>
+                      <a:headEnd type="none" w="med" len="med"/>
+                      <a:tailEnd type="none" w="med" len="med"/>
+                    </a:lnL>
+                    <a:lnR w="12700" cap="flat" cmpd="sng" algn="ctr">
+                      <a:solidFill>
+                        <a:srgbClr val="E3EBF0"/>
+                      </a:solidFill>
+                      <a:prstDash val="solid"/>
+                      <a:round/>
+                      <a:headEnd type="none" w="med" len="med"/>
+                      <a:tailEnd type="none" w="med" len="med"/>
+                    </a:lnR>
+                    <a:lnT w="12700" cap="flat" cmpd="sng" algn="ctr">
+                      <a:solidFill>
+                        <a:srgbClr val="E3EBF0"/>
+                      </a:solidFill>
+                      <a:prstDash val="solid"/>
+                      <a:round/>
+                      <a:headEnd type="none" w="med" len="med"/>
+                      <a:tailEnd type="none" w="med" len="med"/>
+                    </a:lnT>
+                    <a:lnB w="12700" cap="flat" cmpd="sng" algn="ctr">
+                      <a:solidFill>
+                        <a:srgbClr val="E3EBF0"/>
+                      </a:solidFill>
+                      <a:prstDash val="solid"/>
+                      <a:round/>
+                      <a:headEnd type="none" w="med" len="med"/>
+                      <a:tailEnd type="none" w="med" len="med"/>
+                    </a:lnB>
+                    <a:solidFill>
+                      <a:srgbClr val="FFFFFF"/>
+                    </a:solidFill>
+                  </a:tcPr>
+                </a:tc>
               </a:tr>
-              <a:tr h="960120">
+              <a:tr h="713232">
                 <a:tc>
                   <a:txBody>
                     <a:bodyPr/>
@@ -5551,7 +5763,7 @@
                           <a:ea typeface="Calibri" pitchFamily="34" charset="-122"/>
                           <a:cs typeface="Calibri" pitchFamily="34" charset="-120"/>
                         </a:rPr>
-                        <a:t>SIR, SemaMark</a:t>
+                        <a:t>SemStamp</a:t>
                       </a:r>
                       <a:endParaRPr lang="en-US" sz="1650" dirty="0">
                         <a:latin typeface="Calibri" charset="0"/>
@@ -5619,7 +5831,7 @@
                           <a:ea typeface="Calibri" pitchFamily="34" charset="-122"/>
                           <a:cs typeface="Calibri" pitchFamily="34" charset="-120"/>
                         </a:rPr>
-                        <a:t>semantic embeddings</a:t>
+                        <a:t>sentence embedding</a:t>
                       </a:r>
                       <a:endParaRPr lang="en-US" sz="1650" dirty="0">
                         <a:latin typeface="Calibri" charset="0"/>
@@ -5681,13 +5893,13 @@
                       <a:r>
                         <a:rPr lang="en-US" sz="1650" dirty="0">
                           <a:solidFill>
-                            <a:srgbClr val="243342"/>
+                            <a:srgbClr val="12A48B"/>
                           </a:solidFill>
                           <a:latin typeface="Calibri" pitchFamily="34" charset="0"/>
                           <a:ea typeface="Calibri" pitchFamily="34" charset="-122"/>
                           <a:cs typeface="Calibri" pitchFamily="34" charset="-120"/>
                         </a:rPr>
-                        <a:t>similarity does not protect negation, numbers, causality, attribution</a:t>
+                        <a:t>0.99</a:t>
                       </a:r>
                       <a:endParaRPr lang="en-US" sz="1650" dirty="0">
                         <a:latin typeface="Calibri" charset="0"/>
@@ -5739,7 +5951,7 @@
                   </a:tcPr>
                 </a:tc>
               </a:tr>
-              <a:tr h="960120">
+              <a:tr h="713232">
                 <a:tc>
                   <a:txBody>
                     <a:bodyPr/>
@@ -5825,7 +6037,7 @@
                           <a:ea typeface="Calibri" pitchFamily="34" charset="-122"/>
                           <a:cs typeface="Calibri" pitchFamily="34" charset="-120"/>
                         </a:rPr>
-                        <a:t>AMR structures</a:t>
+                        <a:t>AMR / meaning</a:t>
                       </a:r>
                       <a:endParaRPr lang="en-US" sz="1650" dirty="0">
                         <a:latin typeface="Calibri" charset="0"/>
@@ -5887,13 +6099,13 @@
                       <a:r>
                         <a:rPr lang="en-US" sz="1650" dirty="0">
                           <a:solidFill>
-                            <a:srgbClr val="243342"/>
+                            <a:srgbClr val="12A48B"/>
                           </a:solidFill>
                           <a:latin typeface="Calibri" pitchFamily="34" charset="0"/>
                           <a:ea typeface="Calibri" pitchFamily="34" charset="-122"/>
                           <a:cs typeface="Calibri" pitchFamily="34" charset="-120"/>
                         </a:rPr>
-                        <a:t>existing formalism, no watermark-specific mutability contract</a:t>
+                        <a:t>1.00</a:t>
                       </a:r>
                       <a:endParaRPr lang="en-US" sz="1650" dirty="0">
                         <a:latin typeface="Calibri" charset="0"/>
@@ -5945,7 +6157,7 @@
                   </a:tcPr>
                 </a:tc>
               </a:tr>
-              <a:tr h="960120">
+              <a:tr h="713232">
                 <a:tc>
                   <a:txBody>
                     <a:bodyPr/>
@@ -6031,7 +6243,7 @@
                           <a:ea typeface="Calibri" pitchFamily="34" charset="-122"/>
                           <a:cs typeface="Calibri" pitchFamily="34" charset="-120"/>
                         </a:rPr>
-                        <a:t>typed invariant classes</a:t>
+                        <a:t>invariant + MAC</a:t>
                       </a:r>
                       <a:endParaRPr lang="en-US" sz="1650" dirty="0">
                         <a:latin typeface="Calibri" charset="0"/>
@@ -6093,13 +6305,13 @@
                       <a:r>
                         <a:rPr lang="en-US" sz="1650" b="1" dirty="0">
                           <a:solidFill>
-                            <a:srgbClr val="243342"/>
+                            <a:srgbClr val="12A48B"/>
                           </a:solidFill>
                           <a:latin typeface="Calibri" pitchFamily="34" charset="0"/>
                           <a:ea typeface="Calibri" pitchFamily="34" charset="-122"/>
                           <a:cs typeface="Calibri" pitchFamily="34" charset="-120"/>
                         </a:rPr>
-                        <a:t>machine-checkable contract: what must hold, what may carry bits</a:t>
+                        <a:t>1.00 ✓</a:t>
                       </a:r>
                       <a:endParaRPr lang="en-US" sz="1650" dirty="0">
                         <a:latin typeface="Calibri" charset="0"/>
@@ -6157,7 +6369,74 @@
       </p:graphicFrame>
       <p:sp>
         <p:nvSpPr>
-          <p:cNvPr id="74" name="Shape 68"/>
+          <p:cNvPr id="74" name="Text 68"/>
+          <p:cNvSpPr/>
+          <p:nvPr/>
+        </p:nvSpPr>
+        <p:spPr>
+          <a:xfrm>
+            <a:off x="24917400" y="18928080"/>
+            <a:ext cx="10515600" cy="914400"/>
+          </a:xfrm>
+          <a:prstGeom prst="rect">
+            <a:avLst/>
+          </a:prstGeom>
+          <a:noFill/>
+          <a:ln/>
+        </p:spPr>
+        <p:txBody>
+          <a:bodyPr wrap="square" lIns="0" tIns="0" rIns="0" bIns="0" rtlCol="0" anchor="t"/>
+          <a:lstStyle/>
+          <a:p>
+            <a:pPr indent="0" marL="0">
+              <a:buNone/>
+            </a:pPr>
+            <a:r>
+              <a:rPr lang="en-US" sz="1500" i="1" dirty="0">
+                <a:solidFill>
+                  <a:srgbClr val="5B6B78"/>
+                </a:solidFill>
+                <a:latin typeface="Calibri" pitchFamily="34" charset="0"/>
+                <a:ea typeface="Calibri" pitchFamily="34" charset="-122"/>
+                <a:cs typeface="Calibri" pitchFamily="34" charset="-120"/>
+              </a:rPr>
+              <a:t>EN→KO, TPR @ 1% FPR, shared Stage-1 channel. </a:t>
+            </a:r>
+            <a:pPr indent="0" marL="0">
+              <a:buNone/>
+            </a:pPr>
+            <a:r>
+              <a:rPr lang="en-US" sz="1500" b="1" dirty="0">
+                <a:solidFill>
+                  <a:srgbClr val="0F4C81"/>
+                </a:solidFill>
+                <a:latin typeface="Calibri" pitchFamily="34" charset="0"/>
+                <a:ea typeface="Calibri" pitchFamily="34" charset="-122"/>
+                <a:cs typeface="Calibri" pitchFamily="34" charset="-120"/>
+              </a:rPr>
+              <a:t>Token marks collapse; semantic-layer marks survive — </a:t>
+            </a:r>
+            <a:pPr indent="0" marL="0">
+              <a:buNone/>
+            </a:pPr>
+            <a:r>
+              <a:rPr lang="en-US" sz="1500" dirty="0">
+                <a:solidFill>
+                  <a:srgbClr val="5B6B78"/>
+                </a:solidFill>
+                <a:latin typeface="Calibri" pitchFamily="34" charset="0"/>
+                <a:ea typeface="Calibri" pitchFamily="34" charset="-122"/>
+                <a:cs typeface="Calibri" pitchFamily="34" charset="-120"/>
+              </a:rPr>
+              <a:t>only Truthprint also authenticates (MAC).</a:t>
+            </a:r>
+            <a:endParaRPr lang="en-US" sz="1500" dirty="0"/>
+          </a:p>
+        </p:txBody>
+      </p:sp>
+      <p:sp>
+        <p:nvSpPr>
+          <p:cNvPr id="75" name="Shape 69"/>
           <p:cNvSpPr/>
           <p:nvPr/>
         </p:nvSpPr>
@@ -6191,7 +6470,7 @@
       </p:sp>
       <p:sp>
         <p:nvSpPr>
-          <p:cNvPr id="75" name="Text 69"/>
+          <p:cNvPr id="76" name="Text 70"/>
           <p:cNvSpPr/>
           <p:nvPr/>
         </p:nvSpPr>
@@ -6230,7 +6509,7 @@
       </p:sp>
       <p:sp>
         <p:nvSpPr>
-          <p:cNvPr id="76" name="Text 70"/>
+          <p:cNvPr id="77" name="Text 71"/>
           <p:cNvSpPr/>
           <p:nvPr/>
         </p:nvSpPr>
